--- a/media/module8/slides.pptx
+++ b/media/module8/slides.pptx
@@ -3108,8 +3108,8 @@
         </p:nvSpPr>
         <p:spPr>
           <a:xfrm>
-            <a:off x="548640" y="2011680"/>
-            <a:ext cx="11064240" cy="2286000"/>
+            <a:off x="548640" y="1828800"/>
+            <a:ext cx="11064240" cy="2743200"/>
           </a:xfrm>
           <a:prstGeom prst="rect">
             <a:avLst/>
@@ -3118,15 +3118,22 @@
         </p:spPr>
         <p:txBody>
           <a:bodyPr wrap="square">
-            <a:spAutoFit/>
+            <a:noAutofit/>
           </a:bodyPr>
           <a:lstStyle/>
           <a:p>
             <a:pPr algn="ctr">
-              <a:defRPr sz="4400" b="1">
+              <a:lnSpc>
+                <a:spcPts val="2200"/>
+              </a:lnSpc>
+              <a:spcAft>
+                <a:spcPts val="400"/>
+              </a:spcAft>
+              <a:defRPr sz="4000" b="1">
                 <a:solidFill>
                   <a:srgbClr val="1A1A2E"/>
                 </a:solidFill>
+                <a:latin typeface="Calibri"/>
               </a:defRPr>
             </a:pPr>
             <a:r>
@@ -3135,13 +3142,17 @@
           </a:p>
           <a:p>
             <a:pPr algn="ctr">
+              <a:lnSpc>
+                <a:spcPts val="2200"/>
+              </a:lnSpc>
               <a:spcBef>
-                <a:spcPts val="1200"/>
+                <a:spcPts val="1400"/>
               </a:spcBef>
-              <a:defRPr sz="3200">
+              <a:defRPr sz="2600" b="0">
                 <a:solidFill>
                   <a:srgbClr val="333333"/>
                 </a:solidFill>
+                <a:latin typeface="Calibri"/>
               </a:defRPr>
             </a:pPr>
             <a:r>
@@ -3167,16 +3178,20 @@
           <a:noFill/>
         </p:spPr>
         <p:txBody>
-          <a:bodyPr wrap="none">
-            <a:spAutoFit/>
+          <a:bodyPr wrap="square">
+            <a:noAutofit/>
           </a:bodyPr>
           <a:lstStyle/>
           <a:p>
             <a:pPr algn="r">
-              <a:defRPr sz="1000">
+              <a:lnSpc>
+                <a:spcPts val="2200"/>
+              </a:lnSpc>
+              <a:defRPr sz="1000" b="0">
                 <a:solidFill>
                   <a:srgbClr val="666666"/>
                 </a:solidFill>
+                <a:latin typeface="Calibri"/>
               </a:defRPr>
             </a:pPr>
             <a:r>
@@ -3211,8 +3226,8 @@
         </p:nvSpPr>
         <p:spPr>
           <a:xfrm>
-            <a:off x="548640" y="457200"/>
-            <a:ext cx="11064240" cy="731520"/>
+            <a:off x="548640" y="411480"/>
+            <a:ext cx="11064240" cy="777240"/>
           </a:xfrm>
           <a:prstGeom prst="rect">
             <a:avLst/>
@@ -3220,16 +3235,20 @@
           <a:noFill/>
         </p:spPr>
         <p:txBody>
-          <a:bodyPr wrap="none">
-            <a:spAutoFit/>
+          <a:bodyPr wrap="square">
+            <a:noAutofit/>
           </a:bodyPr>
           <a:lstStyle/>
           <a:p>
             <a:pPr>
-              <a:defRPr sz="3200" b="1">
+              <a:lnSpc>
+                <a:spcPts val="2200"/>
+              </a:lnSpc>
+              <a:defRPr sz="2800" b="1">
                 <a:solidFill>
                   <a:srgbClr val="1A1A2E"/>
                 </a:solidFill>
+                <a:latin typeface="Calibri"/>
               </a:defRPr>
             </a:pPr>
             <a:r>
@@ -3246,27 +3265,57 @@
         </p:nvSpPr>
         <p:spPr>
           <a:xfrm>
-            <a:off x="548640" y="1143000"/>
-            <a:ext cx="11064240" cy="548640"/>
+            <a:off x="548640" y="1051560"/>
+            <a:ext cx="11064240" cy="914400"/>
           </a:xfrm>
           <a:prstGeom prst="rect">
             <a:avLst/>
           </a:prstGeom>
-          <a:noFill/>
-        </p:spPr>
-        <p:txBody>
-          <a:bodyPr wrap="none">
-            <a:spAutoFit/>
+          <a:solidFill>
+            <a:srgbClr val="F4F4F4"/>
+          </a:solidFill>
+        </p:spPr>
+        <p:txBody>
+          <a:bodyPr wrap="square">
+            <a:noAutofit/>
           </a:bodyPr>
           <a:lstStyle/>
           <a:p>
             <a:pPr>
-              <a:defRPr sz="1400">
+              <a:lnSpc>
+                <a:spcPts val="2200"/>
+              </a:lnSpc>
+              <a:spcAft>
+                <a:spcPts val="200"/>
+              </a:spcAft>
+              <a:defRPr sz="2000" b="0">
+                <a:solidFill>
+                  <a:srgbClr val="333333"/>
+                </a:solidFill>
                 <a:latin typeface="Consolas"/>
               </a:defRPr>
             </a:pPr>
             <a:r>
-              <a:t>$ grep INFO module8/examples/template/sample_project/logs/run.log 2&gt;/dev/null | head -3</a:t>
+              <a:t>$ grep INFO module8/examples/template/sample_project/logs/run.log</a:t>
+            </a:r>
+          </a:p>
+          <a:p>
+            <a:pPr>
+              <a:lnSpc>
+                <a:spcPts val="2200"/>
+              </a:lnSpc>
+              <a:spcAft>
+                <a:spcPts val="200"/>
+              </a:spcAft>
+              <a:defRPr sz="2000" b="0">
+                <a:solidFill>
+                  <a:srgbClr val="333333"/>
+                </a:solidFill>
+                <a:latin typeface="Consolas"/>
+              </a:defRPr>
+            </a:pPr>
+            <a:r>
+              <a:t>      2&gt;/dev/null | head -3</a:t>
             </a:r>
           </a:p>
         </p:txBody>
@@ -3287,8 +3336,8 @@
         </p:blipFill>
         <p:spPr>
           <a:xfrm>
-            <a:off x="548640" y="1828800"/>
-            <a:ext cx="11064240" cy="3840480"/>
+            <a:off x="548640" y="1965960"/>
+            <a:ext cx="7071358" cy="3977639"/>
           </a:xfrm>
           <a:prstGeom prst="rect">
             <a:avLst/>
@@ -3312,16 +3361,20 @@
           <a:noFill/>
         </p:spPr>
         <p:txBody>
-          <a:bodyPr wrap="none">
-            <a:spAutoFit/>
+          <a:bodyPr wrap="square">
+            <a:noAutofit/>
           </a:bodyPr>
           <a:lstStyle/>
           <a:p>
             <a:pPr algn="r">
-              <a:defRPr sz="1000">
+              <a:lnSpc>
+                <a:spcPts val="2200"/>
+              </a:lnSpc>
+              <a:defRPr sz="1000" b="0">
                 <a:solidFill>
                   <a:srgbClr val="666666"/>
                 </a:solidFill>
+                <a:latin typeface="Calibri"/>
               </a:defRPr>
             </a:pPr>
             <a:r>
@@ -3365,13 +3418,21 @@
           <a:noFill/>
         </p:spPr>
         <p:txBody>
-          <a:bodyPr wrap="none">
-            <a:spAutoFit/>
+          <a:bodyPr wrap="square">
+            <a:noAutofit/>
           </a:bodyPr>
           <a:lstStyle/>
           <a:p>
             <a:pPr algn="ctr">
-              <a:defRPr sz="4000" b="1"/>
+              <a:lnSpc>
+                <a:spcPts val="2200"/>
+              </a:lnSpc>
+              <a:defRPr sz="3600" b="1">
+                <a:solidFill>
+                  <a:srgbClr val="1A1A2E"/>
+                </a:solidFill>
+                <a:latin typeface="Calibri"/>
+              </a:defRPr>
             </a:pPr>
             <a:r>
               <a:t>Practice</a:t>
@@ -3396,16 +3457,20 @@
           <a:noFill/>
         </p:spPr>
         <p:txBody>
-          <a:bodyPr wrap="none">
-            <a:spAutoFit/>
+          <a:bodyPr wrap="square">
+            <a:noAutofit/>
           </a:bodyPr>
           <a:lstStyle/>
           <a:p>
             <a:pPr algn="r">
-              <a:defRPr sz="1000">
+              <a:lnSpc>
+                <a:spcPts val="2200"/>
+              </a:lnSpc>
+              <a:defRPr sz="1000" b="0">
                 <a:solidFill>
                   <a:srgbClr val="666666"/>
                 </a:solidFill>
+                <a:latin typeface="Calibri"/>
               </a:defRPr>
             </a:pPr>
             <a:r>
@@ -3440,8 +3505,8 @@
         </p:nvSpPr>
         <p:spPr>
           <a:xfrm>
-            <a:off x="548640" y="457200"/>
-            <a:ext cx="11064240" cy="731520"/>
+            <a:off x="548640" y="411480"/>
+            <a:ext cx="11064240" cy="777240"/>
           </a:xfrm>
           <a:prstGeom prst="rect">
             <a:avLst/>
@@ -3449,16 +3514,20 @@
           <a:noFill/>
         </p:spPr>
         <p:txBody>
-          <a:bodyPr wrap="none">
-            <a:spAutoFit/>
+          <a:bodyPr wrap="square">
+            <a:noAutofit/>
           </a:bodyPr>
           <a:lstStyle/>
           <a:p>
             <a:pPr>
-              <a:defRPr sz="3200" b="1">
+              <a:lnSpc>
+                <a:spcPts val="2200"/>
+              </a:lnSpc>
+              <a:defRPr sz="2800" b="1">
                 <a:solidFill>
                   <a:srgbClr val="1A1A2E"/>
                 </a:solidFill>
+                <a:latin typeface="Calibri"/>
               </a:defRPr>
             </a:pPr>
             <a:r>
@@ -3475,8 +3544,8 @@
         </p:nvSpPr>
         <p:spPr>
           <a:xfrm>
-            <a:off x="548640" y="1280160"/>
-            <a:ext cx="11064240" cy="4754880"/>
+            <a:off x="548640" y="1234440"/>
+            <a:ext cx="11064240" cy="4937760"/>
           </a:xfrm>
           <a:prstGeom prst="rect">
             <a:avLst/>
@@ -3485,52 +3554,64 @@
         </p:spPr>
         <p:txBody>
           <a:bodyPr wrap="square">
-            <a:spAutoFit/>
+            <a:noAutofit/>
           </a:bodyPr>
           <a:lstStyle/>
           <a:p>
             <a:pPr>
+              <a:lnSpc>
+                <a:spcPts val="2200"/>
+              </a:lnSpc>
               <a:spcAft>
-                <a:spcPts val="800"/>
+                <a:spcPts val="1000"/>
               </a:spcAft>
-              <a:defRPr sz="2000">
+              <a:defRPr sz="2000" b="0">
                 <a:solidFill>
                   <a:srgbClr val="333333"/>
                 </a:solidFill>
+                <a:latin typeface="Calibri"/>
               </a:defRPr>
             </a:pPr>
             <a:r>
-              <a:t>Walk through sample_project/</a:t>
+              <a:t>• Walk through sample_project/</a:t>
             </a:r>
           </a:p>
           <a:p>
             <a:pPr>
+              <a:lnSpc>
+                <a:spcPts val="2200"/>
+              </a:lnSpc>
               <a:spcAft>
-                <a:spcPts val="800"/>
+                <a:spcPts val="1000"/>
               </a:spcAft>
-              <a:defRPr sz="2000">
+              <a:defRPr sz="2000" b="0">
                 <a:solidFill>
                   <a:srgbClr val="333333"/>
                 </a:solidFill>
+                <a:latin typeface="Calibri"/>
               </a:defRPr>
             </a:pPr>
             <a:r>
-              <a:t>Make a commit after a script run</a:t>
+              <a:t>• Make a commit after a script run</a:t>
             </a:r>
           </a:p>
           <a:p>
             <a:pPr>
+              <a:lnSpc>
+                <a:spcPts val="2200"/>
+              </a:lnSpc>
               <a:spcAft>
-                <a:spcPts val="800"/>
+                <a:spcPts val="1000"/>
               </a:spcAft>
-              <a:defRPr sz="2000">
+              <a:defRPr sz="2000" b="0">
                 <a:solidFill>
                   <a:srgbClr val="333333"/>
                 </a:solidFill>
+                <a:latin typeface="Calibri"/>
               </a:defRPr>
             </a:pPr>
             <a:r>
-              <a:t>Review pre-push checklist in module8</a:t>
+              <a:t>• Review pre-push checklist in module8</a:t>
             </a:r>
           </a:p>
         </p:txBody>
@@ -3552,16 +3633,20 @@
           <a:noFill/>
         </p:spPr>
         <p:txBody>
-          <a:bodyPr wrap="none">
-            <a:spAutoFit/>
+          <a:bodyPr wrap="square">
+            <a:noAutofit/>
           </a:bodyPr>
           <a:lstStyle/>
           <a:p>
             <a:pPr algn="r">
-              <a:defRPr sz="1000">
+              <a:lnSpc>
+                <a:spcPts val="2200"/>
+              </a:lnSpc>
+              <a:defRPr sz="1000" b="0">
                 <a:solidFill>
                   <a:srgbClr val="666666"/>
                 </a:solidFill>
+                <a:latin typeface="Calibri"/>
               </a:defRPr>
             </a:pPr>
             <a:r>
@@ -3596,8 +3681,8 @@
         </p:nvSpPr>
         <p:spPr>
           <a:xfrm>
-            <a:off x="548640" y="457200"/>
-            <a:ext cx="11064240" cy="731520"/>
+            <a:off x="548640" y="411480"/>
+            <a:ext cx="11064240" cy="777240"/>
           </a:xfrm>
           <a:prstGeom prst="rect">
             <a:avLst/>
@@ -3605,16 +3690,20 @@
           <a:noFill/>
         </p:spPr>
         <p:txBody>
-          <a:bodyPr wrap="none">
-            <a:spAutoFit/>
+          <a:bodyPr wrap="square">
+            <a:noAutofit/>
           </a:bodyPr>
           <a:lstStyle/>
           <a:p>
             <a:pPr>
-              <a:defRPr sz="3200" b="1">
+              <a:lnSpc>
+                <a:spcPts val="2200"/>
+              </a:lnSpc>
+              <a:defRPr sz="2800" b="1">
                 <a:solidFill>
                   <a:srgbClr val="1A1A2E"/>
                 </a:solidFill>
+                <a:latin typeface="Calibri"/>
               </a:defRPr>
             </a:pPr>
             <a:r>
@@ -3631,8 +3720,8 @@
         </p:nvSpPr>
         <p:spPr>
           <a:xfrm>
-            <a:off x="548640" y="1280160"/>
-            <a:ext cx="11064240" cy="4754880"/>
+            <a:off x="548640" y="1234440"/>
+            <a:ext cx="11064240" cy="4937760"/>
           </a:xfrm>
           <a:prstGeom prst="rect">
             <a:avLst/>
@@ -3641,67 +3730,83 @@
         </p:spPr>
         <p:txBody>
           <a:bodyPr wrap="square">
-            <a:spAutoFit/>
+            <a:noAutofit/>
           </a:bodyPr>
           <a:lstStyle/>
           <a:p>
             <a:pPr>
+              <a:lnSpc>
+                <a:spcPts val="2200"/>
+              </a:lnSpc>
               <a:spcAft>
-                <a:spcPts val="800"/>
+                <a:spcPts val="1000"/>
               </a:spcAft>
-              <a:defRPr sz="2000">
+              <a:defRPr sz="2000" b="0">
                 <a:solidFill>
                   <a:srgbClr val="333333"/>
                 </a:solidFill>
+                <a:latin typeface="Calibri"/>
               </a:defRPr>
             </a:pPr>
             <a:r>
-              <a:t>Unix + Git + scripts together</a:t>
+              <a:t>• Unix + Git + scripts together</a:t>
             </a:r>
           </a:p>
           <a:p>
             <a:pPr>
+              <a:lnSpc>
+                <a:spcPts val="2200"/>
+              </a:lnSpc>
               <a:spcAft>
-                <a:spcPts val="800"/>
+                <a:spcPts val="1000"/>
               </a:spcAft>
-              <a:defRPr sz="2000">
+              <a:defRPr sz="2000" b="0">
                 <a:solidFill>
                   <a:srgbClr val="333333"/>
                 </a:solidFill>
+                <a:latin typeface="Calibri"/>
               </a:defRPr>
             </a:pPr>
             <a:r>
-              <a:t>You are ready for design courses</a:t>
+              <a:t>• You are ready for design courses</a:t>
             </a:r>
           </a:p>
           <a:p>
             <a:pPr>
+              <a:lnSpc>
+                <a:spcPts val="2200"/>
+              </a:lnSpc>
               <a:spcAft>
-                <a:spcPts val="800"/>
+                <a:spcPts val="1000"/>
               </a:spcAft>
-              <a:defRPr sz="2000">
+              <a:defRPr sz="2000" b="0">
                 <a:solidFill>
                   <a:srgbClr val="333333"/>
                 </a:solidFill>
+                <a:latin typeface="Calibri"/>
               </a:defRPr>
             </a:pPr>
             <a:r>
-              <a:t>Course complete — keep practicing</a:t>
+              <a:t>• Course complete — keep practicing</a:t>
             </a:r>
           </a:p>
           <a:p>
             <a:pPr>
+              <a:lnSpc>
+                <a:spcPts val="2200"/>
+              </a:lnSpc>
               <a:spcAft>
-                <a:spcPts val="800"/>
+                <a:spcPts val="1000"/>
               </a:spcAft>
-              <a:defRPr sz="2000">
+              <a:defRPr sz="2000" b="0">
                 <a:solidFill>
                   <a:srgbClr val="333333"/>
                 </a:solidFill>
+                <a:latin typeface="Calibri"/>
               </a:defRPr>
             </a:pPr>
             <a:r>
-              <a:t>Next: Digital design &amp; verification courses</a:t>
+              <a:t>• Next: Digital design &amp; verification courses</a:t>
             </a:r>
           </a:p>
         </p:txBody>
@@ -3723,16 +3828,20 @@
           <a:noFill/>
         </p:spPr>
         <p:txBody>
-          <a:bodyPr wrap="none">
-            <a:spAutoFit/>
+          <a:bodyPr wrap="square">
+            <a:noAutofit/>
           </a:bodyPr>
           <a:lstStyle/>
           <a:p>
             <a:pPr algn="r">
-              <a:defRPr sz="1000">
+              <a:lnSpc>
+                <a:spcPts val="2200"/>
+              </a:lnSpc>
+              <a:defRPr sz="1000" b="0">
                 <a:solidFill>
                   <a:srgbClr val="666666"/>
                 </a:solidFill>
+                <a:latin typeface="Calibri"/>
               </a:defRPr>
             </a:pPr>
             <a:r>
@@ -3767,8 +3876,8 @@
         </p:nvSpPr>
         <p:spPr>
           <a:xfrm>
-            <a:off x="548640" y="457200"/>
-            <a:ext cx="11064240" cy="731520"/>
+            <a:off x="548640" y="411480"/>
+            <a:ext cx="11064240" cy="777240"/>
           </a:xfrm>
           <a:prstGeom prst="rect">
             <a:avLst/>
@@ -3776,16 +3885,20 @@
           <a:noFill/>
         </p:spPr>
         <p:txBody>
-          <a:bodyPr wrap="none">
-            <a:spAutoFit/>
+          <a:bodyPr wrap="square">
+            <a:noAutofit/>
           </a:bodyPr>
           <a:lstStyle/>
           <a:p>
             <a:pPr>
-              <a:defRPr sz="3200" b="1">
+              <a:lnSpc>
+                <a:spcPts val="2200"/>
+              </a:lnSpc>
+              <a:defRPr sz="2800" b="1">
                 <a:solidFill>
                   <a:srgbClr val="1A1A2E"/>
                 </a:solidFill>
+                <a:latin typeface="Calibri"/>
               </a:defRPr>
             </a:pPr>
             <a:r>
@@ -3802,8 +3915,8 @@
         </p:nvSpPr>
         <p:spPr>
           <a:xfrm>
-            <a:off x="548640" y="1280160"/>
-            <a:ext cx="11064240" cy="4754880"/>
+            <a:off x="548640" y="1234440"/>
+            <a:ext cx="11064240" cy="4937760"/>
           </a:xfrm>
           <a:prstGeom prst="rect">
             <a:avLst/>
@@ -3812,67 +3925,83 @@
         </p:spPr>
         <p:txBody>
           <a:bodyPr wrap="square">
-            <a:spAutoFit/>
+            <a:noAutofit/>
           </a:bodyPr>
           <a:lstStyle/>
           <a:p>
             <a:pPr>
+              <a:lnSpc>
+                <a:spcPts val="2200"/>
+              </a:lnSpc>
               <a:spcAft>
-                <a:spcPts val="800"/>
+                <a:spcPts val="1000"/>
               </a:spcAft>
-              <a:defRPr sz="2000">
+              <a:defRPr sz="2000" b="0">
                 <a:solidFill>
                   <a:srgbClr val="333333"/>
                 </a:solidFill>
+                <a:latin typeface="Calibri"/>
               </a:defRPr>
             </a:pPr>
             <a:r>
-              <a:t>Bootstrap a project from a template repo</a:t>
+              <a:t>• Bootstrap a project from a template repo</a:t>
             </a:r>
           </a:p>
           <a:p>
             <a:pPr>
+              <a:lnSpc>
+                <a:spcPts val="2200"/>
+              </a:lnSpc>
               <a:spcAft>
-                <a:spcPts val="800"/>
+                <a:spcPts val="1000"/>
               </a:spcAft>
-              <a:defRPr sz="2000">
+              <a:defRPr sz="2000" b="0">
                 <a:solidFill>
                   <a:srgbClr val="333333"/>
                 </a:solidFill>
+                <a:latin typeface="Calibri"/>
               </a:defRPr>
             </a:pPr>
             <a:r>
-              <a:t>Run scripted build/test flows</a:t>
+              <a:t>• Run scripted build/test flows</a:t>
             </a:r>
           </a:p>
           <a:p>
             <a:pPr>
+              <a:lnSpc>
+                <a:spcPts val="2200"/>
+              </a:lnSpc>
               <a:spcAft>
-                <a:spcPts val="800"/>
+                <a:spcPts val="1000"/>
               </a:spcAft>
-              <a:defRPr sz="2000">
+              <a:defRPr sz="2000" b="0">
                 <a:solidFill>
                   <a:srgbClr val="333333"/>
                 </a:solidFill>
+                <a:latin typeface="Calibri"/>
               </a:defRPr>
             </a:pPr>
             <a:r>
-              <a:t>Capture and analyze logs</a:t>
+              <a:t>• Capture and analyze logs</a:t>
             </a:r>
           </a:p>
           <a:p>
             <a:pPr>
+              <a:lnSpc>
+                <a:spcPts val="2200"/>
+              </a:lnSpc>
               <a:spcAft>
-                <a:spcPts val="800"/>
+                <a:spcPts val="1000"/>
               </a:spcAft>
-              <a:defRPr sz="2000">
+              <a:defRPr sz="2000" b="0">
                 <a:solidFill>
                   <a:srgbClr val="333333"/>
                 </a:solidFill>
+                <a:latin typeface="Calibri"/>
               </a:defRPr>
             </a:pPr>
             <a:r>
-              <a:t>Commit milestones and push for submission</a:t>
+              <a:t>• Commit milestones and push for submission</a:t>
             </a:r>
           </a:p>
         </p:txBody>
@@ -3894,16 +4023,20 @@
           <a:noFill/>
         </p:spPr>
         <p:txBody>
-          <a:bodyPr wrap="none">
-            <a:spAutoFit/>
+          <a:bodyPr wrap="square">
+            <a:noAutofit/>
           </a:bodyPr>
           <a:lstStyle/>
           <a:p>
             <a:pPr algn="r">
-              <a:defRPr sz="1000">
+              <a:lnSpc>
+                <a:spcPts val="2200"/>
+              </a:lnSpc>
+              <a:defRPr sz="1000" b="0">
                 <a:solidFill>
                   <a:srgbClr val="666666"/>
                 </a:solidFill>
+                <a:latin typeface="Calibri"/>
               </a:defRPr>
             </a:pPr>
             <a:r>
@@ -3938,8 +4071,8 @@
         </p:nvSpPr>
         <p:spPr>
           <a:xfrm>
-            <a:off x="548640" y="457200"/>
-            <a:ext cx="11064240" cy="731520"/>
+            <a:off x="548640" y="411480"/>
+            <a:ext cx="11064240" cy="777240"/>
           </a:xfrm>
           <a:prstGeom prst="rect">
             <a:avLst/>
@@ -3947,16 +4080,20 @@
           <a:noFill/>
         </p:spPr>
         <p:txBody>
-          <a:bodyPr wrap="none">
-            <a:spAutoFit/>
+          <a:bodyPr wrap="square">
+            <a:noAutofit/>
           </a:bodyPr>
           <a:lstStyle/>
           <a:p>
             <a:pPr>
-              <a:defRPr sz="3200" b="1">
+              <a:lnSpc>
+                <a:spcPts val="2200"/>
+              </a:lnSpc>
+              <a:defRPr sz="2800" b="1">
                 <a:solidFill>
                   <a:srgbClr val="1A1A2E"/>
                 </a:solidFill>
+                <a:latin typeface="Calibri"/>
               </a:defRPr>
             </a:pPr>
             <a:r>
@@ -3973,8 +4110,8 @@
         </p:nvSpPr>
         <p:spPr>
           <a:xfrm>
-            <a:off x="548640" y="1280160"/>
-            <a:ext cx="11064240" cy="4754880"/>
+            <a:off x="548640" y="1234440"/>
+            <a:ext cx="11064240" cy="4937760"/>
           </a:xfrm>
           <a:prstGeom prst="rect">
             <a:avLst/>
@@ -3983,22 +4120,26 @@
         </p:spPr>
         <p:txBody>
           <a:bodyPr wrap="square">
-            <a:spAutoFit/>
+            <a:noAutofit/>
           </a:bodyPr>
           <a:lstStyle/>
           <a:p>
             <a:pPr>
+              <a:lnSpc>
+                <a:spcPts val="2200"/>
+              </a:lnSpc>
               <a:spcAft>
-                <a:spcPts val="800"/>
+                <a:spcPts val="1000"/>
               </a:spcAft>
-              <a:defRPr sz="2000">
+              <a:defRPr sz="2000" b="0">
                 <a:solidFill>
                   <a:srgbClr val="333333"/>
                 </a:solidFill>
+                <a:latin typeface="Calibri"/>
               </a:defRPr>
             </a:pPr>
             <a:r>
-              <a:t>Modules 1–7 or equivalent experience</a:t>
+              <a:t>• Modules 1–7 or equivalent experience</a:t>
             </a:r>
           </a:p>
         </p:txBody>
@@ -4020,16 +4161,20 @@
           <a:noFill/>
         </p:spPr>
         <p:txBody>
-          <a:bodyPr wrap="none">
-            <a:spAutoFit/>
+          <a:bodyPr wrap="square">
+            <a:noAutofit/>
           </a:bodyPr>
           <a:lstStyle/>
           <a:p>
             <a:pPr algn="r">
-              <a:defRPr sz="1000">
+              <a:lnSpc>
+                <a:spcPts val="2200"/>
+              </a:lnSpc>
+              <a:defRPr sz="1000" b="0">
                 <a:solidFill>
                   <a:srgbClr val="666666"/>
                 </a:solidFill>
+                <a:latin typeface="Calibri"/>
               </a:defRPr>
             </a:pPr>
             <a:r>
@@ -4064,8 +4209,8 @@
         </p:nvSpPr>
         <p:spPr>
           <a:xfrm>
-            <a:off x="548640" y="457200"/>
-            <a:ext cx="11064240" cy="731520"/>
+            <a:off x="548640" y="411480"/>
+            <a:ext cx="11064240" cy="777240"/>
           </a:xfrm>
           <a:prstGeom prst="rect">
             <a:avLst/>
@@ -4073,16 +4218,20 @@
           <a:noFill/>
         </p:spPr>
         <p:txBody>
-          <a:bodyPr wrap="none">
-            <a:spAutoFit/>
+          <a:bodyPr wrap="square">
+            <a:noAutofit/>
           </a:bodyPr>
           <a:lstStyle/>
           <a:p>
             <a:pPr>
-              <a:defRPr sz="3200" b="1">
+              <a:lnSpc>
+                <a:spcPts val="2200"/>
+              </a:lnSpc>
+              <a:defRPr sz="2800" b="1">
                 <a:solidFill>
                   <a:srgbClr val="1A1A2E"/>
                 </a:solidFill>
+                <a:latin typeface="Calibri"/>
               </a:defRPr>
             </a:pPr>
             <a:r>
@@ -4107,8 +4256,8 @@
         </p:blipFill>
         <p:spPr>
           <a:xfrm>
-            <a:off x="548640" y="1234440"/>
-            <a:ext cx="11064240" cy="4389120"/>
+            <a:off x="548640" y="1143000"/>
+            <a:ext cx="8128000" cy="4572000"/>
           </a:xfrm>
           <a:prstGeom prst="rect">
             <a:avLst/>
@@ -4132,16 +4281,20 @@
           <a:noFill/>
         </p:spPr>
         <p:txBody>
-          <a:bodyPr wrap="none">
-            <a:spAutoFit/>
+          <a:bodyPr wrap="square">
+            <a:noAutofit/>
           </a:bodyPr>
           <a:lstStyle/>
           <a:p>
             <a:pPr algn="r">
-              <a:defRPr sz="1000">
+              <a:lnSpc>
+                <a:spcPts val="2200"/>
+              </a:lnSpc>
+              <a:defRPr sz="1000" b="0">
                 <a:solidFill>
                   <a:srgbClr val="666666"/>
                 </a:solidFill>
+                <a:latin typeface="Calibri"/>
               </a:defRPr>
             </a:pPr>
             <a:r>
@@ -4176,8 +4329,8 @@
         </p:nvSpPr>
         <p:spPr>
           <a:xfrm>
-            <a:off x="548640" y="457200"/>
-            <a:ext cx="11064240" cy="731520"/>
+            <a:off x="548640" y="411480"/>
+            <a:ext cx="11064240" cy="777240"/>
           </a:xfrm>
           <a:prstGeom prst="rect">
             <a:avLst/>
@@ -4185,16 +4338,20 @@
           <a:noFill/>
         </p:spPr>
         <p:txBody>
-          <a:bodyPr wrap="none">
-            <a:spAutoFit/>
+          <a:bodyPr wrap="square">
+            <a:noAutofit/>
           </a:bodyPr>
           <a:lstStyle/>
           <a:p>
             <a:pPr>
-              <a:defRPr sz="3200" b="1">
+              <a:lnSpc>
+                <a:spcPts val="2200"/>
+              </a:lnSpc>
+              <a:defRPr sz="2800" b="1">
                 <a:solidFill>
                   <a:srgbClr val="1A1A2E"/>
                 </a:solidFill>
+                <a:latin typeface="Calibri"/>
               </a:defRPr>
             </a:pPr>
             <a:r>
@@ -4211,8 +4368,8 @@
         </p:nvSpPr>
         <p:spPr>
           <a:xfrm>
-            <a:off x="548640" y="1280160"/>
-            <a:ext cx="11064240" cy="4754880"/>
+            <a:off x="548640" y="1234440"/>
+            <a:ext cx="11064240" cy="4937760"/>
           </a:xfrm>
           <a:prstGeom prst="rect">
             <a:avLst/>
@@ -4221,52 +4378,64 @@
         </p:spPr>
         <p:txBody>
           <a:bodyPr wrap="square">
-            <a:spAutoFit/>
+            <a:noAutofit/>
           </a:bodyPr>
           <a:lstStyle/>
           <a:p>
             <a:pPr>
+              <a:lnSpc>
+                <a:spcPts val="2200"/>
+              </a:lnSpc>
               <a:spcAft>
-                <a:spcPts val="800"/>
+                <a:spcPts val="1000"/>
               </a:spcAft>
-              <a:defRPr sz="2000">
+              <a:defRPr sz="2000" b="0">
                 <a:solidFill>
                   <a:srgbClr val="333333"/>
                 </a:solidFill>
+                <a:latin typeface="Calibri"/>
               </a:defRPr>
             </a:pPr>
             <a:r>
-              <a:t>Full loop: edit → run → inspect → commit → push</a:t>
+              <a:t>• Full loop: edit → run → inspect → commit → push</a:t>
             </a:r>
           </a:p>
           <a:p>
             <a:pPr>
+              <a:lnSpc>
+                <a:spcPts val="2200"/>
+              </a:lnSpc>
               <a:spcAft>
-                <a:spcPts val="800"/>
+                <a:spcPts val="1000"/>
               </a:spcAft>
-              <a:defRPr sz="2000">
+              <a:defRPr sz="2000" b="0">
                 <a:solidFill>
                   <a:srgbClr val="333333"/>
                 </a:solidFill>
+                <a:latin typeface="Calibri"/>
               </a:defRPr>
             </a:pPr>
             <a:r>
-              <a:t>Reproducibility matters for grading and debug</a:t>
+              <a:t>• Reproducibility matters for grading and debug</a:t>
             </a:r>
           </a:p>
           <a:p>
             <a:pPr>
+              <a:lnSpc>
+                <a:spcPts val="2200"/>
+              </a:lnSpc>
               <a:spcAft>
-                <a:spcPts val="800"/>
+                <a:spcPts val="1000"/>
               </a:spcAft>
-              <a:defRPr sz="2000">
+              <a:defRPr sz="2000" b="0">
                 <a:solidFill>
                   <a:srgbClr val="333333"/>
                 </a:solidFill>
+                <a:latin typeface="Calibri"/>
               </a:defRPr>
             </a:pPr>
             <a:r>
-              <a:t>Pre-push checks catch common mistakes</a:t>
+              <a:t>• Pre-push checks catch common mistakes</a:t>
             </a:r>
           </a:p>
         </p:txBody>
@@ -4288,16 +4457,20 @@
           <a:noFill/>
         </p:spPr>
         <p:txBody>
-          <a:bodyPr wrap="none">
-            <a:spAutoFit/>
+          <a:bodyPr wrap="square">
+            <a:noAutofit/>
           </a:bodyPr>
           <a:lstStyle/>
           <a:p>
             <a:pPr algn="r">
-              <a:defRPr sz="1000">
+              <a:lnSpc>
+                <a:spcPts val="2200"/>
+              </a:lnSpc>
+              <a:defRPr sz="1000" b="0">
                 <a:solidFill>
                   <a:srgbClr val="666666"/>
                 </a:solidFill>
+                <a:latin typeface="Calibri"/>
               </a:defRPr>
             </a:pPr>
             <a:r>
@@ -4341,13 +4514,21 @@
           <a:noFill/>
         </p:spPr>
         <p:txBody>
-          <a:bodyPr wrap="none">
-            <a:spAutoFit/>
+          <a:bodyPr wrap="square">
+            <a:noAutofit/>
           </a:bodyPr>
           <a:lstStyle/>
           <a:p>
             <a:pPr algn="ctr">
-              <a:defRPr sz="4000" b="1"/>
+              <a:lnSpc>
+                <a:spcPts val="2200"/>
+              </a:lnSpc>
+              <a:defRPr sz="3600" b="1">
+                <a:solidFill>
+                  <a:srgbClr val="1A1A2E"/>
+                </a:solidFill>
+                <a:latin typeface="Calibri"/>
+              </a:defRPr>
             </a:pPr>
             <a:r>
               <a:t>Core topics</a:t>
@@ -4372,16 +4553,20 @@
           <a:noFill/>
         </p:spPr>
         <p:txBody>
-          <a:bodyPr wrap="none">
-            <a:spAutoFit/>
+          <a:bodyPr wrap="square">
+            <a:noAutofit/>
           </a:bodyPr>
           <a:lstStyle/>
           <a:p>
             <a:pPr algn="r">
-              <a:defRPr sz="1000">
+              <a:lnSpc>
+                <a:spcPts val="2200"/>
+              </a:lnSpc>
+              <a:defRPr sz="1000" b="0">
                 <a:solidFill>
                   <a:srgbClr val="666666"/>
                 </a:solidFill>
+                <a:latin typeface="Calibri"/>
               </a:defRPr>
             </a:pPr>
             <a:r>
@@ -4416,8 +4601,8 @@
         </p:nvSpPr>
         <p:spPr>
           <a:xfrm>
-            <a:off x="548640" y="457200"/>
-            <a:ext cx="11064240" cy="731520"/>
+            <a:off x="548640" y="411480"/>
+            <a:ext cx="11064240" cy="777240"/>
           </a:xfrm>
           <a:prstGeom prst="rect">
             <a:avLst/>
@@ -4425,16 +4610,20 @@
           <a:noFill/>
         </p:spPr>
         <p:txBody>
-          <a:bodyPr wrap="none">
-            <a:spAutoFit/>
+          <a:bodyPr wrap="square">
+            <a:noAutofit/>
           </a:bodyPr>
           <a:lstStyle/>
           <a:p>
             <a:pPr>
-              <a:defRPr sz="3200" b="1">
+              <a:lnSpc>
+                <a:spcPts val="2200"/>
+              </a:lnSpc>
+              <a:defRPr sz="2800" b="1">
                 <a:solidFill>
                   <a:srgbClr val="1A1A2E"/>
                 </a:solidFill>
+                <a:latin typeface="Calibri"/>
               </a:defRPr>
             </a:pPr>
             <a:r>
@@ -4451,22 +4640,33 @@
         </p:nvSpPr>
         <p:spPr>
           <a:xfrm>
-            <a:off x="548640" y="1143000"/>
-            <a:ext cx="11064240" cy="548640"/>
+            <a:off x="548640" y="1051560"/>
+            <a:ext cx="11064240" cy="914400"/>
           </a:xfrm>
           <a:prstGeom prst="rect">
             <a:avLst/>
           </a:prstGeom>
-          <a:noFill/>
-        </p:spPr>
-        <p:txBody>
-          <a:bodyPr wrap="none">
-            <a:spAutoFit/>
+          <a:solidFill>
+            <a:srgbClr val="F4F4F4"/>
+          </a:solidFill>
+        </p:spPr>
+        <p:txBody>
+          <a:bodyPr wrap="square">
+            <a:noAutofit/>
           </a:bodyPr>
           <a:lstStyle/>
           <a:p>
             <a:pPr>
-              <a:defRPr sz="1400">
+              <a:lnSpc>
+                <a:spcPts val="2200"/>
+              </a:lnSpc>
+              <a:spcAft>
+                <a:spcPts val="200"/>
+              </a:spcAft>
+              <a:defRPr sz="2000" b="0">
+                <a:solidFill>
+                  <a:srgbClr val="333333"/>
+                </a:solidFill>
                 <a:latin typeface="Consolas"/>
               </a:defRPr>
             </a:pPr>
@@ -4492,8 +4692,8 @@
         </p:blipFill>
         <p:spPr>
           <a:xfrm>
-            <a:off x="548640" y="1828800"/>
-            <a:ext cx="11064240" cy="3840480"/>
+            <a:off x="548640" y="1965960"/>
+            <a:ext cx="7071358" cy="3977639"/>
           </a:xfrm>
           <a:prstGeom prst="rect">
             <a:avLst/>
@@ -4517,16 +4717,20 @@
           <a:noFill/>
         </p:spPr>
         <p:txBody>
-          <a:bodyPr wrap="none">
-            <a:spAutoFit/>
+          <a:bodyPr wrap="square">
+            <a:noAutofit/>
           </a:bodyPr>
           <a:lstStyle/>
           <a:p>
             <a:pPr algn="r">
-              <a:defRPr sz="1000">
+              <a:lnSpc>
+                <a:spcPts val="2200"/>
+              </a:lnSpc>
+              <a:defRPr sz="1000" b="0">
                 <a:solidFill>
                   <a:srgbClr val="666666"/>
                 </a:solidFill>
+                <a:latin typeface="Calibri"/>
               </a:defRPr>
             </a:pPr>
             <a:r>
@@ -4561,8 +4765,8 @@
         </p:nvSpPr>
         <p:spPr>
           <a:xfrm>
-            <a:off x="548640" y="457200"/>
-            <a:ext cx="11064240" cy="731520"/>
+            <a:off x="548640" y="411480"/>
+            <a:ext cx="11064240" cy="777240"/>
           </a:xfrm>
           <a:prstGeom prst="rect">
             <a:avLst/>
@@ -4570,16 +4774,20 @@
           <a:noFill/>
         </p:spPr>
         <p:txBody>
-          <a:bodyPr wrap="none">
-            <a:spAutoFit/>
+          <a:bodyPr wrap="square">
+            <a:noAutofit/>
           </a:bodyPr>
           <a:lstStyle/>
           <a:p>
             <a:pPr>
-              <a:defRPr sz="3200" b="1">
+              <a:lnSpc>
+                <a:spcPts val="2200"/>
+              </a:lnSpc>
+              <a:defRPr sz="2800" b="1">
                 <a:solidFill>
                   <a:srgbClr val="1A1A2E"/>
                 </a:solidFill>
+                <a:latin typeface="Calibri"/>
               </a:defRPr>
             </a:pPr>
             <a:r>
@@ -4596,7 +4804,7 @@
         </p:nvSpPr>
         <p:spPr>
           <a:xfrm>
-            <a:off x="548640" y="1234440"/>
+            <a:off x="548640" y="1143000"/>
             <a:ext cx="11064240" cy="5029200"/>
           </a:xfrm>
           <a:prstGeom prst="rect">
@@ -4608,12 +4816,18 @@
         </p:spPr>
         <p:txBody>
           <a:bodyPr wrap="square">
-            <a:spAutoFit/>
+            <a:noAutofit/>
           </a:bodyPr>
           <a:lstStyle/>
           <a:p>
             <a:pPr>
-              <a:defRPr sz="1400">
+              <a:lnSpc>
+                <a:spcPts val="2200"/>
+              </a:lnSpc>
+              <a:spcAft>
+                <a:spcPts val="400"/>
+              </a:spcAft>
+              <a:defRPr sz="2000" b="0">
                 <a:solidFill>
                   <a:srgbClr val="333333"/>
                 </a:solidFill>
@@ -4623,7 +4837,22 @@
             <a:r>
               <a:t>./scripts/run_demo.sh &gt; logs/run.log 2&gt;&amp;1</a:t>
             </a:r>
-            <a:br/>
+          </a:p>
+          <a:p>
+            <a:pPr>
+              <a:lnSpc>
+                <a:spcPts val="2200"/>
+              </a:lnSpc>
+              <a:spcAft>
+                <a:spcPts val="400"/>
+              </a:spcAft>
+              <a:defRPr sz="2000" b="0">
+                <a:solidFill>
+                  <a:srgbClr val="333333"/>
+                </a:solidFill>
+                <a:latin typeface="Consolas"/>
+              </a:defRPr>
+            </a:pPr>
             <a:r>
               <a:t>grep -i error logs/run.log</a:t>
             </a:r>
@@ -4647,16 +4876,20 @@
           <a:noFill/>
         </p:spPr>
         <p:txBody>
-          <a:bodyPr wrap="none">
-            <a:spAutoFit/>
+          <a:bodyPr wrap="square">
+            <a:noAutofit/>
           </a:bodyPr>
           <a:lstStyle/>
           <a:p>
             <a:pPr algn="r">
-              <a:defRPr sz="1000">
+              <a:lnSpc>
+                <a:spcPts val="2200"/>
+              </a:lnSpc>
+              <a:defRPr sz="1000" b="0">
                 <a:solidFill>
                   <a:srgbClr val="666666"/>
                 </a:solidFill>
+                <a:latin typeface="Calibri"/>
               </a:defRPr>
             </a:pPr>
             <a:r>
@@ -4691,8 +4924,8 @@
         </p:nvSpPr>
         <p:spPr>
           <a:xfrm>
-            <a:off x="548640" y="457200"/>
-            <a:ext cx="11064240" cy="731520"/>
+            <a:off x="548640" y="411480"/>
+            <a:ext cx="11064240" cy="777240"/>
           </a:xfrm>
           <a:prstGeom prst="rect">
             <a:avLst/>
@@ -4700,16 +4933,20 @@
           <a:noFill/>
         </p:spPr>
         <p:txBody>
-          <a:bodyPr wrap="none">
-            <a:spAutoFit/>
+          <a:bodyPr wrap="square">
+            <a:noAutofit/>
           </a:bodyPr>
           <a:lstStyle/>
           <a:p>
             <a:pPr>
-              <a:defRPr sz="3200" b="1">
+              <a:lnSpc>
+                <a:spcPts val="2200"/>
+              </a:lnSpc>
+              <a:defRPr sz="2800" b="1">
                 <a:solidFill>
                   <a:srgbClr val="1A1A2E"/>
                 </a:solidFill>
+                <a:latin typeface="Calibri"/>
               </a:defRPr>
             </a:pPr>
             <a:r>
@@ -4726,27 +4963,57 @@
         </p:nvSpPr>
         <p:spPr>
           <a:xfrm>
-            <a:off x="548640" y="1143000"/>
-            <a:ext cx="11064240" cy="548640"/>
+            <a:off x="548640" y="1051560"/>
+            <a:ext cx="11064240" cy="914400"/>
           </a:xfrm>
           <a:prstGeom prst="rect">
             <a:avLst/>
           </a:prstGeom>
-          <a:noFill/>
-        </p:spPr>
-        <p:txBody>
-          <a:bodyPr wrap="none">
-            <a:spAutoFit/>
+          <a:solidFill>
+            <a:srgbClr val="F4F4F4"/>
+          </a:solidFill>
+        </p:spPr>
+        <p:txBody>
+          <a:bodyPr wrap="square">
+            <a:noAutofit/>
           </a:bodyPr>
           <a:lstStyle/>
           <a:p>
             <a:pPr>
-              <a:defRPr sz="1400">
+              <a:lnSpc>
+                <a:spcPts val="2200"/>
+              </a:lnSpc>
+              <a:spcAft>
+                <a:spcPts val="200"/>
+              </a:spcAft>
+              <a:defRPr sz="2000" b="0">
+                <a:solidFill>
+                  <a:srgbClr val="333333"/>
+                </a:solidFill>
                 <a:latin typeface="Consolas"/>
               </a:defRPr>
             </a:pPr>
             <a:r>
-              <a:t>$ cd module8/examples/template/sample_project &amp;&amp; chmod u+x scripts/run_demo.sh &amp;&amp; ./scripts/run_demo.sh</a:t>
+              <a:t>$ cd module8/examples/template/sample_project &amp;&amp; chmod u+x</a:t>
+            </a:r>
+          </a:p>
+          <a:p>
+            <a:pPr>
+              <a:lnSpc>
+                <a:spcPts val="2200"/>
+              </a:lnSpc>
+              <a:spcAft>
+                <a:spcPts val="200"/>
+              </a:spcAft>
+              <a:defRPr sz="2000" b="0">
+                <a:solidFill>
+                  <a:srgbClr val="333333"/>
+                </a:solidFill>
+                <a:latin typeface="Consolas"/>
+              </a:defRPr>
+            </a:pPr>
+            <a:r>
+              <a:t>      scripts/run_demo.sh &amp;&amp; ./scripts/run_demo.sh</a:t>
             </a:r>
           </a:p>
         </p:txBody>
@@ -4767,8 +5034,8 @@
         </p:blipFill>
         <p:spPr>
           <a:xfrm>
-            <a:off x="548640" y="1828800"/>
-            <a:ext cx="11064240" cy="3840480"/>
+            <a:off x="548640" y="1965960"/>
+            <a:ext cx="7071358" cy="3977639"/>
           </a:xfrm>
           <a:prstGeom prst="rect">
             <a:avLst/>
@@ -4792,16 +5059,20 @@
           <a:noFill/>
         </p:spPr>
         <p:txBody>
-          <a:bodyPr wrap="none">
-            <a:spAutoFit/>
+          <a:bodyPr wrap="square">
+            <a:noAutofit/>
           </a:bodyPr>
           <a:lstStyle/>
           <a:p>
             <a:pPr algn="r">
-              <a:defRPr sz="1000">
+              <a:lnSpc>
+                <a:spcPts val="2200"/>
+              </a:lnSpc>
+              <a:defRPr sz="1000" b="0">
                 <a:solidFill>
                   <a:srgbClr val="666666"/>
                 </a:solidFill>
+                <a:latin typeface="Calibri"/>
               </a:defRPr>
             </a:pPr>
             <a:r>
